--- a/slides/Week4_Recap.pptx
+++ b/slides/Week4_Recap.pptx
@@ -203,7 +203,7 @@
   <pc:docChgLst>
     <pc:chgData name="Zhao Jin" userId="cd05a825-544c-438a-9ba1-08e63db50b47" providerId="ADAL" clId="{5DF3A229-1965-414E-AF54-F4C37AC7DF68}"/>
     <pc:docChg chg="undo custSel addSld delSld modSld">
-      <pc:chgData name="Zhao Jin" userId="cd05a825-544c-438a-9ba1-08e63db50b47" providerId="ADAL" clId="{5DF3A229-1965-414E-AF54-F4C37AC7DF68}" dt="2026-02-09T06:34:52.270" v="1365"/>
+      <pc:chgData name="Zhao Jin" userId="cd05a825-544c-438a-9ba1-08e63db50b47" providerId="ADAL" clId="{5DF3A229-1965-414E-AF54-F4C37AC7DF68}" dt="2026-02-10T03:59:30.977" v="1374" actId="1037"/>
       <pc:docMkLst>
         <pc:docMk/>
       </pc:docMkLst>
@@ -402,7 +402,7 @@
         </pc:picChg>
       </pc:sldChg>
       <pc:sldChg chg="addSp delSp modSp add mod addAnim delAnim modAnim">
-        <pc:chgData name="Zhao Jin" userId="cd05a825-544c-438a-9ba1-08e63db50b47" providerId="ADAL" clId="{5DF3A229-1965-414E-AF54-F4C37AC7DF68}" dt="2026-02-09T06:34:52.270" v="1365"/>
+        <pc:chgData name="Zhao Jin" userId="cd05a825-544c-438a-9ba1-08e63db50b47" providerId="ADAL" clId="{5DF3A229-1965-414E-AF54-F4C37AC7DF68}" dt="2026-02-10T03:59:30.977" v="1374" actId="1037"/>
         <pc:sldMkLst>
           <pc:docMk/>
           <pc:sldMk cId="3923016209" sldId="579"/>
@@ -440,7 +440,7 @@
           </ac:spMkLst>
         </pc:spChg>
         <pc:spChg chg="add mod">
-          <ac:chgData name="Zhao Jin" userId="cd05a825-544c-438a-9ba1-08e63db50b47" providerId="ADAL" clId="{5DF3A229-1965-414E-AF54-F4C37AC7DF68}" dt="2026-02-09T06:31:14.272" v="1342" actId="1037"/>
+          <ac:chgData name="Zhao Jin" userId="cd05a825-544c-438a-9ba1-08e63db50b47" providerId="ADAL" clId="{5DF3A229-1965-414E-AF54-F4C37AC7DF68}" dt="2026-02-10T03:59:28.558" v="1373" actId="14100"/>
           <ac:spMkLst>
             <pc:docMk/>
             <pc:sldMk cId="3923016209" sldId="579"/>
@@ -448,7 +448,7 @@
           </ac:spMkLst>
         </pc:spChg>
         <pc:spChg chg="add mod">
-          <ac:chgData name="Zhao Jin" userId="cd05a825-544c-438a-9ba1-08e63db50b47" providerId="ADAL" clId="{5DF3A229-1965-414E-AF54-F4C37AC7DF68}" dt="2026-02-09T06:31:16.862" v="1345" actId="1035"/>
+          <ac:chgData name="Zhao Jin" userId="cd05a825-544c-438a-9ba1-08e63db50b47" providerId="ADAL" clId="{5DF3A229-1965-414E-AF54-F4C37AC7DF68}" dt="2026-02-10T03:59:30.977" v="1374" actId="1037"/>
           <ac:spMkLst>
             <pc:docMk/>
             <pc:sldMk cId="3923016209" sldId="579"/>
@@ -1793,7 +1793,7 @@
               <a:pPr>
                 <a:defRPr/>
               </a:pPr>
-              <a:t>2/9/2026</a:t>
+              <a:t>2/10/2026</a:t>
             </a:fld>
             <a:endParaRPr lang="en-US"/>
           </a:p>
@@ -17104,8 +17104,8 @@
         </p:nvSpPr>
         <p:spPr>
           <a:xfrm flipV="1">
-            <a:off x="1924049" y="2603203"/>
-            <a:ext cx="3705225" cy="276224"/>
+            <a:off x="2228849" y="2613429"/>
+            <a:ext cx="3400425" cy="265995"/>
           </a:xfrm>
           <a:prstGeom prst="rect">
             <a:avLst/>
@@ -17158,8 +17158,8 @@
         </p:nvSpPr>
         <p:spPr>
           <a:xfrm>
-            <a:off x="1924049" y="3143478"/>
-            <a:ext cx="3705224" cy="276225"/>
+            <a:off x="2224086" y="3143478"/>
+            <a:ext cx="3400423" cy="276225"/>
           </a:xfrm>
           <a:prstGeom prst="rect">
             <a:avLst/>
